--- a/powerpoints/AI 居然也會「一本正經地胡說八道」？—— 三大「幻覺」大作戰！.pptx
+++ b/powerpoints/AI 居然也會「一本正經地胡說八道」？—— 三大「幻覺」大作戰！.pptx
@@ -311,7 +311,7 @@
           <a:p>
             <a:fld id="{5BCAD085-E8A6-8845-BD4E-CB4CCA059FC4}" type="datetimeFigureOut">
               <a:rPr lang="en-US" smtClean="0"/>
-              <a:t>7/28/26</a:t>
+              <a:t>7/28/2026</a:t>
             </a:fld>
             <a:endParaRPr lang="en-US"/>
           </a:p>
@@ -479,7 +479,7 @@
           <a:p>
             <a:fld id="{5BCAD085-E8A6-8845-BD4E-CB4CCA059FC4}" type="datetimeFigureOut">
               <a:rPr lang="en-US" smtClean="0"/>
-              <a:t>7/28/26</a:t>
+              <a:t>7/28/2026</a:t>
             </a:fld>
             <a:endParaRPr lang="en-US"/>
           </a:p>
@@ -657,7 +657,7 @@
           <a:p>
             <a:fld id="{5BCAD085-E8A6-8845-BD4E-CB4CCA059FC4}" type="datetimeFigureOut">
               <a:rPr lang="en-US" smtClean="0"/>
-              <a:t>7/28/26</a:t>
+              <a:t>7/28/2026</a:t>
             </a:fld>
             <a:endParaRPr lang="en-US"/>
           </a:p>
@@ -825,7 +825,7 @@
           <a:p>
             <a:fld id="{5BCAD085-E8A6-8845-BD4E-CB4CCA059FC4}" type="datetimeFigureOut">
               <a:rPr lang="en-US" smtClean="0"/>
-              <a:t>7/28/26</a:t>
+              <a:t>7/28/2026</a:t>
             </a:fld>
             <a:endParaRPr lang="en-US"/>
           </a:p>
@@ -1070,7 +1070,7 @@
           <a:p>
             <a:fld id="{5BCAD085-E8A6-8845-BD4E-CB4CCA059FC4}" type="datetimeFigureOut">
               <a:rPr lang="en-US" smtClean="0"/>
-              <a:t>7/28/26</a:t>
+              <a:t>7/28/2026</a:t>
             </a:fld>
             <a:endParaRPr lang="en-US"/>
           </a:p>
@@ -1355,7 +1355,7 @@
           <a:p>
             <a:fld id="{5BCAD085-E8A6-8845-BD4E-CB4CCA059FC4}" type="datetimeFigureOut">
               <a:rPr lang="en-US" smtClean="0"/>
-              <a:t>7/28/26</a:t>
+              <a:t>7/28/2026</a:t>
             </a:fld>
             <a:endParaRPr lang="en-US"/>
           </a:p>
@@ -1774,7 +1774,7 @@
           <a:p>
             <a:fld id="{5BCAD085-E8A6-8845-BD4E-CB4CCA059FC4}" type="datetimeFigureOut">
               <a:rPr lang="en-US" smtClean="0"/>
-              <a:t>7/28/26</a:t>
+              <a:t>7/28/2026</a:t>
             </a:fld>
             <a:endParaRPr lang="en-US"/>
           </a:p>
@@ -1891,7 +1891,7 @@
           <a:p>
             <a:fld id="{5BCAD085-E8A6-8845-BD4E-CB4CCA059FC4}" type="datetimeFigureOut">
               <a:rPr lang="en-US" smtClean="0"/>
-              <a:t>7/28/26</a:t>
+              <a:t>7/28/2026</a:t>
             </a:fld>
             <a:endParaRPr lang="en-US"/>
           </a:p>
@@ -1986,7 +1986,7 @@
           <a:p>
             <a:fld id="{5BCAD085-E8A6-8845-BD4E-CB4CCA059FC4}" type="datetimeFigureOut">
               <a:rPr lang="en-US" smtClean="0"/>
-              <a:t>7/28/26</a:t>
+              <a:t>7/28/2026</a:t>
             </a:fld>
             <a:endParaRPr lang="en-US"/>
           </a:p>
@@ -2261,7 +2261,7 @@
           <a:p>
             <a:fld id="{5BCAD085-E8A6-8845-BD4E-CB4CCA059FC4}" type="datetimeFigureOut">
               <a:rPr lang="en-US" smtClean="0"/>
-              <a:t>7/28/26</a:t>
+              <a:t>7/28/2026</a:t>
             </a:fld>
             <a:endParaRPr lang="en-US"/>
           </a:p>
@@ -2513,7 +2513,7 @@
           <a:p>
             <a:fld id="{5BCAD085-E8A6-8845-BD4E-CB4CCA059FC4}" type="datetimeFigureOut">
               <a:rPr lang="en-US" smtClean="0"/>
-              <a:t>7/28/26</a:t>
+              <a:t>7/28/2026</a:t>
             </a:fld>
             <a:endParaRPr lang="en-US"/>
           </a:p>
@@ -2724,7 +2724,7 @@
           <a:p>
             <a:fld id="{5BCAD085-E8A6-8845-BD4E-CB4CCA059FC4}" type="datetimeFigureOut">
               <a:rPr lang="en-US" smtClean="0"/>
-              <a:t>7/28/26</a:t>
+              <a:t>7/28/2026</a:t>
             </a:fld>
             <a:endParaRPr lang="en-US"/>
           </a:p>
@@ -3363,6 +3363,18 @@
   <p:clrMapOvr>
     <a:masterClrMapping/>
   </p:clrMapOvr>
+  <mc:AlternateContent xmlns:mc="http://schemas.openxmlformats.org/markup-compatibility/2006">
+    <mc:Choice xmlns:p14="http://schemas.microsoft.com/office/powerpoint/2010/main" Requires="p14">
+      <p:transition spd="slow" p14:dur="2000">
+        <p:cut/>
+      </p:transition>
+    </mc:Choice>
+    <mc:Fallback>
+      <p:transition spd="slow">
+        <p:cut/>
+      </p:transition>
+    </mc:Fallback>
+  </mc:AlternateContent>
 </p:sld>
 </file>
 
@@ -3941,6 +3953,18 @@
   <p:clrMapOvr>
     <a:masterClrMapping/>
   </p:clrMapOvr>
+  <mc:AlternateContent xmlns:mc="http://schemas.openxmlformats.org/markup-compatibility/2006">
+    <mc:Choice xmlns:p14="http://schemas.microsoft.com/office/powerpoint/2010/main" Requires="p14">
+      <p:transition spd="slow" p14:dur="2000">
+        <p:cut/>
+      </p:transition>
+    </mc:Choice>
+    <mc:Fallback>
+      <p:transition spd="slow">
+        <p:cut/>
+      </p:transition>
+    </mc:Fallback>
+  </mc:AlternateContent>
 </p:sld>
 </file>
 
@@ -4128,49 +4152,103 @@
               </a:lnSpc>
             </a:pPr>
             <a:r>
-              <a:rPr sz="1275" b="0" i="0" u="none">
+              <a:rPr sz="1275" b="0" i="0" u="none" dirty="0">
                 <a:solidFill>
                   <a:srgbClr val="334155"/>
                 </a:solidFill>
                 <a:latin typeface="Noto Sans TC"/>
               </a:rPr>
-              <a:t>「林阿土教授於 </a:t>
-            </a:r>
-            <a:r>
-              <a:rPr sz="1275" b="1" i="0" u="none">
+              <a:t>「</a:t>
+            </a:r>
+            <a:r>
+              <a:rPr sz="1275" b="0" i="0" u="none" dirty="0" err="1">
                 <a:solidFill>
                   <a:srgbClr val="334155"/>
                 </a:solidFill>
                 <a:latin typeface="Noto Sans TC"/>
               </a:rPr>
-              <a:t>1995 年</a:t>
-            </a:r>
-            <a:r>
-              <a:rPr sz="1275" b="0" i="0" u="none">
+              <a:t>林阿土教授於</a:t>
+            </a:r>
+            <a:r>
+              <a:rPr sz="1275" b="0" i="0" u="none" dirty="0">
                 <a:solidFill>
                   <a:srgbClr val="334155"/>
                 </a:solidFill>
                 <a:latin typeface="Noto Sans TC"/>
               </a:rPr>
+              <a:t> </a:t>
+            </a:r>
+            <a:r>
+              <a:rPr sz="1275" b="1" i="0" u="none" dirty="0">
+                <a:solidFill>
+                  <a:srgbClr val="334155"/>
+                </a:solidFill>
+                <a:latin typeface="Noto Sans TC"/>
+              </a:rPr>
+              <a:t>1995 </a:t>
+            </a:r>
+            <a:r>
+              <a:rPr sz="1275" b="1" i="0" u="none" dirty="0" err="1">
+                <a:solidFill>
+                  <a:srgbClr val="334155"/>
+                </a:solidFill>
+                <a:latin typeface="Noto Sans TC"/>
+              </a:rPr>
+              <a:t>年</a:t>
+            </a:r>
+            <a:r>
+              <a:rPr sz="1275" b="0" i="0" u="none" dirty="0" err="1">
+                <a:solidFill>
+                  <a:srgbClr val="334155"/>
+                </a:solidFill>
+                <a:latin typeface="Noto Sans TC"/>
+              </a:rPr>
               <a:t>在國立清華大學成功研發出全球首創的</a:t>
             </a:r>
             <a:r>
-              <a:rPr sz="1275" b="1" i="0" u="none">
+              <a:rPr sz="1275" b="1" i="0" u="none" dirty="0" err="1">
                 <a:solidFill>
                   <a:srgbClr val="0284C7"/>
                 </a:solidFill>
                 <a:latin typeface="Noto Sans TC"/>
               </a:rPr>
-              <a:t>『無重力珍奶杯』</a:t>
-            </a:r>
-            <a:r>
-              <a:rPr sz="1275" b="0" i="0" u="none">
+              <a:t>『無重力珍奶杯</a:t>
+            </a:r>
+            <a:r>
+              <a:rPr sz="1275" b="1" i="0" u="none" dirty="0">
+                <a:solidFill>
+                  <a:srgbClr val="0284C7"/>
+                </a:solidFill>
+                <a:latin typeface="Noto Sans TC"/>
+              </a:rPr>
+              <a:t>』</a:t>
+            </a:r>
+            <a:r>
+              <a:rPr sz="1275" b="0" i="0" u="none" dirty="0">
                 <a:solidFill>
                   <a:srgbClr val="334155"/>
                 </a:solidFill>
                 <a:latin typeface="Noto Sans TC"/>
               </a:rPr>
-              <a:t>，並榮獲日內瓦國際發明展金牌...」</a:t>
+              <a:t>，</a:t>
+            </a:r>
+            <a:r>
+              <a:rPr sz="1275" b="0" i="0" u="none" dirty="0" err="1">
+                <a:solidFill>
+                  <a:srgbClr val="334155"/>
+                </a:solidFill>
+                <a:latin typeface="Noto Sans TC"/>
+              </a:rPr>
+              <a:t>並榮獲日內瓦國際發明展金牌</a:t>
+            </a:r>
+            <a:r>
+              <a:rPr sz="1275" b="0" i="0" u="none" dirty="0">
+                <a:solidFill>
+                  <a:srgbClr val="334155"/>
+                </a:solidFill>
+                <a:latin typeface="Noto Sans TC"/>
+              </a:rPr>
+              <a:t>...」</a:t>
             </a:r>
           </a:p>
         </p:txBody>
@@ -4238,26 +4316,81 @@
               </a:lnSpc>
             </a:pPr>
             <a:r>
-              <a:rPr sz="1350" b="1" i="0" u="none">
+              <a:rPr sz="1350" b="1" i="0" u="none" dirty="0">
                 <a:solidFill>
                   <a:srgbClr val="78350F"/>
                 </a:solidFill>
                 <a:latin typeface="Noto Sans TC"/>
               </a:rPr>
-              <a:t>「林阿土」跟「無重力珍奶杯」完全不存在！</a:t>
-            </a:r>
-            <a:r>
+              <a:t>「</a:t>
+            </a:r>
+            <a:r>
+              <a:rPr sz="1350" b="1" i="0" u="none" dirty="0" err="1">
+                <a:solidFill>
+                  <a:srgbClr val="78350F"/>
+                </a:solidFill>
+                <a:latin typeface="Noto Sans TC"/>
+              </a:rPr>
+              <a:t>林阿土」跟「無重力珍奶杯」完全不存在</a:t>
+            </a:r>
+            <a:r>
+              <a:rPr sz="1350" b="1" i="0" u="none" dirty="0">
+                <a:solidFill>
+                  <a:srgbClr val="78350F"/>
+                </a:solidFill>
+                <a:latin typeface="Noto Sans TC"/>
+              </a:rPr>
+              <a:t>！</a:t>
+            </a:r>
+            <a:r>
+              <a:rPr dirty="0"/>
               <a:t>
 </a:t>
             </a:r>
             <a:r>
-              <a:rPr sz="1350" b="0" i="0" u="none">
+              <a:rPr sz="1350" b="0" i="0" u="none" dirty="0">
                 <a:solidFill>
                   <a:srgbClr val="78350F"/>
                 </a:solidFill>
                 <a:latin typeface="Noto Sans TC"/>
               </a:rPr>
-              <a:t> 這是老師上課前 1 分鐘隨手亂編的假名字！</a:t>
+              <a:t> </a:t>
+            </a:r>
+            <a:r>
+              <a:rPr sz="1350" b="0" i="0" u="none" dirty="0" err="1">
+                <a:solidFill>
+                  <a:srgbClr val="78350F"/>
+                </a:solidFill>
+                <a:latin typeface="Noto Sans TC"/>
+              </a:rPr>
+              <a:t>這是老師上課前</a:t>
+            </a:r>
+            <a:r>
+              <a:rPr sz="1350" b="0" i="0" u="none" dirty="0">
+                <a:solidFill>
+                  <a:srgbClr val="78350F"/>
+                </a:solidFill>
+                <a:latin typeface="Noto Sans TC"/>
+              </a:rPr>
+              <a:t> 1 </a:t>
+            </a:r>
+            <a:r>
+              <a:rPr sz="1350" b="0" i="0" u="none" dirty="0" err="1">
+                <a:solidFill>
+                  <a:srgbClr val="78350F"/>
+                </a:solidFill>
+                <a:latin typeface="Noto Sans TC"/>
+              </a:rPr>
+              <a:t>分鐘隨手亂編的假名字</a:t>
+            </a:r>
+            <a:r>
+              <a:rPr sz="1350" b="0" i="0" u="none" dirty="0">
+                <a:solidFill>
+                  <a:srgbClr val="78350F"/>
+                </a:solidFill>
+                <a:latin typeface="Noto Sans TC"/>
+              </a:rPr>
+              <a:t>！</a:t>
             </a:r>
           </a:p>
         </p:txBody>
@@ -4373,13 +4506,22 @@
           <a:p>
             <a:pPr algn="l"/>
             <a:r>
-              <a:rPr sz="2850" b="1" i="0" u="none">
+              <a:rPr sz="2850" b="1" i="0" u="none" dirty="0" err="1">
                 <a:solidFill>
                   <a:srgbClr val="0F172A"/>
                 </a:solidFill>
                 <a:latin typeface="Noto Sans TC"/>
               </a:rPr>
-              <a:t>現場直擊：誰是「林阿土」教授？</a:t>
+              <a:t>現場直擊：誰是「林阿土」教授</a:t>
+            </a:r>
+            <a:r>
+              <a:rPr sz="2850" b="1" i="0" u="none" dirty="0">
+                <a:solidFill>
+                  <a:srgbClr val="0F172A"/>
+                </a:solidFill>
+                <a:latin typeface="Noto Sans TC"/>
+              </a:rPr>
+              <a:t>？</a:t>
             </a:r>
           </a:p>
         </p:txBody>
@@ -4389,6 +4531,18 @@
   <p:clrMapOvr>
     <a:masterClrMapping/>
   </p:clrMapOvr>
+  <mc:AlternateContent xmlns:mc="http://schemas.openxmlformats.org/markup-compatibility/2006">
+    <mc:Choice xmlns:p14="http://schemas.microsoft.com/office/powerpoint/2010/main" Requires="p14">
+      <p:transition spd="slow" p14:dur="2000">
+        <p:cut/>
+      </p:transition>
+    </mc:Choice>
+    <mc:Fallback>
+      <p:transition spd="slow">
+        <p:cut/>
+      </p:transition>
+    </mc:Fallback>
+  </mc:AlternateContent>
 </p:sld>
 </file>
 
@@ -4517,7 +4671,7 @@
               </a:lnSpc>
             </a:pPr>
             <a:r>
-              <a:rPr sz="1425" b="1" i="0" u="none">
+              <a:rPr sz="1425" b="1" i="0" u="none" dirty="0" err="1">
                 <a:solidFill>
                   <a:srgbClr val="334155"/>
                 </a:solidFill>
@@ -4526,17 +4680,36 @@
               <a:t>沒有自我意識與動機</a:t>
             </a:r>
             <a:r>
+              <a:rPr dirty="0"/>
               <a:t>
 </a:t>
             </a:r>
             <a:r>
-              <a:rPr sz="1425" b="0" i="0" u="none">
+              <a:rPr sz="1425" b="0" i="0" u="none" dirty="0">
                 <a:solidFill>
                   <a:srgbClr val="334155"/>
                 </a:solidFill>
                 <a:latin typeface="Noto Sans TC"/>
               </a:rPr>
-              <a:t> AI 內部並沒有「惡意說謊想騙人類」的壞心眼。</a:t>
+              <a:t> AI </a:t>
+            </a:r>
+            <a:r>
+              <a:rPr sz="1425" b="0" i="0" u="none" dirty="0" err="1">
+                <a:solidFill>
+                  <a:srgbClr val="334155"/>
+                </a:solidFill>
+                <a:latin typeface="Noto Sans TC"/>
+              </a:rPr>
+              <a:t>內部並沒有「惡意說謊想騙人類」的壞心眼</a:t>
+            </a:r>
+            <a:r>
+              <a:rPr sz="1425" b="0" i="0" u="none" dirty="0">
+                <a:solidFill>
+                  <a:srgbClr val="334155"/>
+                </a:solidFill>
+                <a:latin typeface="Noto Sans TC"/>
+              </a:rPr>
+              <a:t>。</a:t>
             </a:r>
           </a:p>
         </p:txBody>
@@ -4569,7 +4742,7 @@
               </a:lnSpc>
             </a:pPr>
             <a:r>
-              <a:rPr sz="1425" b="1" i="0" u="none">
+              <a:rPr sz="1425" b="1" i="0" u="none" dirty="0" err="1">
                 <a:solidFill>
                   <a:srgbClr val="334155"/>
                 </a:solidFill>
@@ -4578,29 +4751,48 @@
               <a:t>極致追尋文字接龍流暢度</a:t>
             </a:r>
             <a:r>
+              <a:rPr dirty="0"/>
               <a:t>
 </a:t>
             </a:r>
             <a:r>
-              <a:rPr sz="1425" b="0" i="0" u="none">
+              <a:rPr sz="1425" b="0" i="0" u="none" dirty="0">
                 <a:solidFill>
                   <a:srgbClr val="334155"/>
                 </a:solidFill>
                 <a:latin typeface="Noto Sans TC"/>
               </a:rPr>
-              <a:t> 它唯一的使命是讓句子的</a:t>
-            </a:r>
-            <a:r>
-              <a:rPr sz="1425" b="1" i="0" u="none">
+              <a:t> </a:t>
+            </a:r>
+            <a:r>
+              <a:rPr sz="1425" b="0" i="0" u="none" dirty="0" err="1">
+                <a:solidFill>
+                  <a:srgbClr val="334155"/>
+                </a:solidFill>
+                <a:latin typeface="Noto Sans TC"/>
+              </a:rPr>
+              <a:t>它唯一的使命是讓句子的</a:t>
+            </a:r>
+            <a:r>
+              <a:rPr sz="1425" b="1" i="0" u="none" dirty="0" err="1">
                 <a:solidFill>
                   <a:srgbClr val="0284C7"/>
                 </a:solidFill>
                 <a:latin typeface="Noto Sans TC"/>
               </a:rPr>
-              <a:t>「語法與統計流暢度最高」</a:t>
-            </a:r>
-            <a:r>
-              <a:rPr sz="1425" b="0" i="0" u="none">
+              <a:t>「語法與統計流暢度最高</a:t>
+            </a:r>
+            <a:r>
+              <a:rPr sz="1425" b="1" i="0" u="none" dirty="0">
+                <a:solidFill>
+                  <a:srgbClr val="0284C7"/>
+                </a:solidFill>
+                <a:latin typeface="Noto Sans TC"/>
+              </a:rPr>
+              <a:t>」</a:t>
+            </a:r>
+            <a:r>
+              <a:rPr sz="1425" b="0" i="0" u="none" dirty="0">
                 <a:solidFill>
                   <a:srgbClr val="334155"/>
                 </a:solidFill>
@@ -4639,7 +4831,7 @@
               </a:lnSpc>
             </a:pPr>
             <a:r>
-              <a:rPr sz="1425" b="1" i="0" u="none">
+              <a:rPr sz="1425" b="1" i="0" u="none" dirty="0" err="1">
                 <a:solidFill>
                   <a:srgbClr val="334155"/>
                 </a:solidFill>
@@ -4648,17 +4840,36 @@
               <a:t>缺乏事實查證機制</a:t>
             </a:r>
             <a:r>
+              <a:rPr dirty="0"/>
               <a:t>
 </a:t>
             </a:r>
             <a:r>
-              <a:rPr sz="1425" b="0" i="0" u="none">
+              <a:rPr sz="1425" b="0" i="0" u="none" dirty="0">
                 <a:solidFill>
                   <a:srgbClr val="334155"/>
                 </a:solidFill>
                 <a:latin typeface="Noto Sans TC"/>
               </a:rPr>
-              <a:t> AI 是語法正確的極致展現，但底層缺乏真實世界的事實約束。</a:t>
+              <a:t> AI </a:t>
+            </a:r>
+            <a:r>
+              <a:rPr sz="1425" b="0" i="0" u="none" dirty="0" err="1">
+                <a:solidFill>
+                  <a:srgbClr val="334155"/>
+                </a:solidFill>
+                <a:latin typeface="Noto Sans TC"/>
+              </a:rPr>
+              <a:t>是語法正確的極致展現，但底層缺乏真實世界的事實約束</a:t>
+            </a:r>
+            <a:r>
+              <a:rPr sz="1425" b="0" i="0" u="none" dirty="0">
+                <a:solidFill>
+                  <a:srgbClr val="334155"/>
+                </a:solidFill>
+                <a:latin typeface="Noto Sans TC"/>
+              </a:rPr>
+              <a:t>。</a:t>
             </a:r>
           </a:p>
         </p:txBody>
@@ -4783,7 +4994,7 @@
           <a:p>
             <a:pPr algn="l"/>
             <a:r>
-              <a:rPr sz="2850" b="1" i="0" u="none">
+              <a:rPr sz="2850" b="1" i="0" u="none" dirty="0" err="1">
                 <a:solidFill>
                   <a:srgbClr val="0F172A"/>
                 </a:solidFill>
@@ -4791,6 +5002,12 @@
               </a:rPr>
               <a:t>幻覺的真相：它不是故意要騙你</a:t>
             </a:r>
+            <a:endParaRPr sz="2850" b="1" i="0" u="none" dirty="0">
+              <a:solidFill>
+                <a:srgbClr val="0F172A"/>
+              </a:solidFill>
+              <a:latin typeface="Noto Sans TC"/>
+            </a:endParaRPr>
           </a:p>
         </p:txBody>
       </p:sp>
@@ -4799,6 +5016,18 @@
   <p:clrMapOvr>
     <a:masterClrMapping/>
   </p:clrMapOvr>
+  <mc:AlternateContent xmlns:mc="http://schemas.openxmlformats.org/markup-compatibility/2006">
+    <mc:Choice xmlns:p14="http://schemas.microsoft.com/office/powerpoint/2010/main" Requires="p14">
+      <p:transition spd="slow" p14:dur="2000">
+        <p:cut/>
+      </p:transition>
+    </mc:Choice>
+    <mc:Fallback>
+      <p:transition spd="slow">
+        <p:cut/>
+      </p:transition>
+    </mc:Fallback>
+  </mc:AlternateContent>
 </p:sld>
 </file>
 
@@ -5132,13 +5361,40 @@
               </a:lnSpc>
             </a:pPr>
             <a:r>
-              <a:rPr sz="1350" b="0" i="0" u="none">
+              <a:rPr sz="1350" b="0" i="0" u="none" dirty="0" err="1">
                 <a:solidFill>
                   <a:srgbClr val="334155"/>
                 </a:solidFill>
                 <a:latin typeface="Noto Sans TC"/>
               </a:rPr>
-              <a:t>即便限定「只能根據文件做摘要」，它仍會在裡面偷塞原文沒寫的內容。</a:t>
+              <a:t>即便限定「只能根據文件做摘要</a:t>
+            </a:r>
+            <a:r>
+              <a:rPr sz="1350" b="0" i="0" u="none" dirty="0">
+                <a:solidFill>
+                  <a:srgbClr val="334155"/>
+                </a:solidFill>
+                <a:latin typeface="Noto Sans TC"/>
+              </a:rPr>
+              <a:t>」，</a:t>
+            </a:r>
+            <a:r>
+              <a:rPr sz="1350" b="0" i="0" u="none" dirty="0" err="1">
+                <a:solidFill>
+                  <a:srgbClr val="334155"/>
+                </a:solidFill>
+                <a:latin typeface="Noto Sans TC"/>
+              </a:rPr>
+              <a:t>它仍會在裡面偷塞原文沒寫的內容</a:t>
+            </a:r>
+            <a:r>
+              <a:rPr sz="1350" b="0" i="0" u="none" dirty="0">
+                <a:solidFill>
+                  <a:srgbClr val="334155"/>
+                </a:solidFill>
+                <a:latin typeface="Noto Sans TC"/>
+              </a:rPr>
+              <a:t>。</a:t>
             </a:r>
           </a:p>
         </p:txBody>
@@ -5353,6 +5609,18 @@
   <p:clrMapOvr>
     <a:masterClrMapping/>
   </p:clrMapOvr>
+  <mc:AlternateContent xmlns:mc="http://schemas.openxmlformats.org/markup-compatibility/2006">
+    <mc:Choice xmlns:p14="http://schemas.microsoft.com/office/powerpoint/2010/main" Requires="p14">
+      <p:transition spd="slow" p14:dur="2000">
+        <p:cut/>
+      </p:transition>
+    </mc:Choice>
+    <mc:Fallback>
+      <p:transition spd="slow">
+        <p:cut/>
+      </p:transition>
+    </mc:Fallback>
+  </mc:AlternateContent>
 </p:sld>
 </file>
 
@@ -5540,13 +5808,49 @@
               </a:lnSpc>
             </a:pPr>
             <a:r>
-              <a:rPr sz="1350" b="0" i="0" u="none">
+              <a:rPr sz="1350" b="0" i="0" u="none" dirty="0">
                 <a:solidFill>
                   <a:srgbClr val="14532D"/>
                 </a:solidFill>
                 <a:latin typeface="Noto Sans TC"/>
               </a:rPr>
-              <a:t>「資管科第一學期開設了『Python 程式設計』基礎課程，旨在培養邏輯思考與語法基礎。」</a:t>
+              <a:t>「</a:t>
+            </a:r>
+            <a:r>
+              <a:rPr sz="1350" b="0" i="0" u="none" dirty="0" err="1">
+                <a:solidFill>
+                  <a:srgbClr val="14532D"/>
+                </a:solidFill>
+                <a:latin typeface="Noto Sans TC"/>
+              </a:rPr>
+              <a:t>資管科第一學期開設了『Python</a:t>
+            </a:r>
+            <a:r>
+              <a:rPr sz="1350" b="0" i="0" u="none" dirty="0">
+                <a:solidFill>
+                  <a:srgbClr val="14532D"/>
+                </a:solidFill>
+                <a:latin typeface="Noto Sans TC"/>
+              </a:rPr>
+              <a:t> </a:t>
+            </a:r>
+            <a:r>
+              <a:rPr sz="1350" b="0" i="0" u="none" dirty="0" err="1">
+                <a:solidFill>
+                  <a:srgbClr val="14532D"/>
+                </a:solidFill>
+                <a:latin typeface="Noto Sans TC"/>
+              </a:rPr>
+              <a:t>程式設計』基礎課程，旨在培養邏輯思考與語法基礎</a:t>
+            </a:r>
+            <a:r>
+              <a:rPr sz="1350" b="0" i="0" u="none" dirty="0">
+                <a:solidFill>
+                  <a:srgbClr val="14532D"/>
+                </a:solidFill>
+                <a:latin typeface="Noto Sans TC"/>
+              </a:rPr>
+              <a:t>。」</a:t>
             </a:r>
           </a:p>
         </p:txBody>
@@ -5614,25 +5918,70 @@
               </a:lnSpc>
             </a:pPr>
             <a:r>
-              <a:rPr sz="1350" b="0" i="0" u="none">
+              <a:rPr sz="1350" b="0" i="0" u="none" dirty="0">
                 <a:solidFill>
                   <a:srgbClr val="7F1D1D"/>
                 </a:solidFill>
                 <a:latin typeface="Noto Sans TC"/>
               </a:rPr>
-              <a:t>「資管科第一學期開設 Python 課，</a:t>
-            </a:r>
-            <a:r>
-              <a:rPr sz="1350" b="1" i="0" u="none">
+              <a:t>「</a:t>
+            </a:r>
+            <a:r>
+              <a:rPr sz="1350" b="0" i="0" u="none" dirty="0" err="1">
+                <a:solidFill>
+                  <a:srgbClr val="7F1D1D"/>
+                </a:solidFill>
+                <a:latin typeface="Noto Sans TC"/>
+              </a:rPr>
+              <a:t>資管科第一學期開設</a:t>
+            </a:r>
+            <a:r>
+              <a:rPr sz="1350" b="0" i="0" u="none" dirty="0">
+                <a:solidFill>
+                  <a:srgbClr val="7F1D1D"/>
+                </a:solidFill>
+                <a:latin typeface="Noto Sans TC"/>
+              </a:rPr>
+              <a:t> Python </a:t>
+            </a:r>
+            <a:r>
+              <a:rPr sz="1350" b="0" i="0" u="none" dirty="0" err="1">
+                <a:solidFill>
+                  <a:srgbClr val="7F1D1D"/>
+                </a:solidFill>
+                <a:latin typeface="Noto Sans TC"/>
+              </a:rPr>
+              <a:t>課，</a:t>
+            </a:r>
+            <a:r>
+              <a:rPr sz="1350" b="1" i="0" u="none" dirty="0" err="1">
                 <a:solidFill>
                   <a:srgbClr val="DC2626"/>
                 </a:solidFill>
                 <a:latin typeface="Noto Sans TC"/>
               </a:rPr>
-              <a:t>期末需要在成果發表會上獨立開發出手機 APP 與購物網站</a:t>
-            </a:r>
-            <a:r>
-              <a:rPr sz="1350" b="0" i="0" u="none">
+              <a:t>期末需要在成果發表會上獨立開發出手機</a:t>
+            </a:r>
+            <a:r>
+              <a:rPr sz="1350" b="1" i="0" u="none" dirty="0">
+                <a:solidFill>
+                  <a:srgbClr val="DC2626"/>
+                </a:solidFill>
+                <a:latin typeface="Noto Sans TC"/>
+              </a:rPr>
+              <a:t> APP </a:t>
+            </a:r>
+            <a:r>
+              <a:rPr sz="1350" b="1" i="0" u="none" dirty="0" err="1">
+                <a:solidFill>
+                  <a:srgbClr val="DC2626"/>
+                </a:solidFill>
+                <a:latin typeface="Noto Sans TC"/>
+              </a:rPr>
+              <a:t>與購物網站</a:t>
+            </a:r>
+            <a:r>
+              <a:rPr sz="1350" b="0" i="0" u="none" dirty="0">
                 <a:solidFill>
                   <a:srgbClr val="7F1D1D"/>
                 </a:solidFill>
@@ -5788,6 +6137,18 @@
   <p:clrMapOvr>
     <a:masterClrMapping/>
   </p:clrMapOvr>
+  <mc:AlternateContent xmlns:mc="http://schemas.openxmlformats.org/markup-compatibility/2006">
+    <mc:Choice xmlns:p14="http://schemas.microsoft.com/office/powerpoint/2010/main" Requires="p14">
+      <p:transition spd="slow" p14:dur="2000">
+        <p:cut/>
+      </p:transition>
+    </mc:Choice>
+    <mc:Fallback>
+      <p:transition spd="slow">
+        <p:cut/>
+      </p:transition>
+    </mc:Fallback>
+  </mc:AlternateContent>
 </p:sld>
 </file>
 
@@ -5951,13 +6312,22 @@
               </a:lnSpc>
             </a:pPr>
             <a:r>
-              <a:rPr sz="1350" b="1" i="0" u="none">
+              <a:rPr sz="1350" b="1" i="0" u="none" dirty="0" err="1">
                 <a:solidFill>
                   <a:srgbClr val="334155"/>
                 </a:solidFill>
                 <a:latin typeface="Noto Sans TC"/>
               </a:rPr>
-              <a:t>外部知識的幻覺 (Factuality Hallucination)</a:t>
+              <a:t>外部知識的幻覺</a:t>
+            </a:r>
+            <a:r>
+              <a:rPr sz="1350" b="1" i="0" u="none" dirty="0">
+                <a:solidFill>
+                  <a:srgbClr val="334155"/>
+                </a:solidFill>
+                <a:latin typeface="Noto Sans TC"/>
+              </a:rPr>
+              <a:t> (Factuality Hallucination)</a:t>
             </a:r>
           </a:p>
         </p:txBody>
@@ -6111,6 +6481,18 @@
   <p:clrMapOvr>
     <a:masterClrMapping/>
   </p:clrMapOvr>
+  <mc:AlternateContent xmlns:mc="http://schemas.openxmlformats.org/markup-compatibility/2006">
+    <mc:Choice xmlns:p14="http://schemas.microsoft.com/office/powerpoint/2010/main" Requires="p14">
+      <p:transition spd="slow" p14:dur="2000">
+        <p:cut/>
+      </p:transition>
+    </mc:Choice>
+    <mc:Fallback>
+      <p:transition spd="slow">
+        <p:cut/>
+      </p:transition>
+    </mc:Fallback>
+  </mc:AlternateContent>
 </p:sld>
 </file>
 
@@ -6215,7 +6597,7 @@
               </a:lnSpc>
             </a:pPr>
             <a:r>
-              <a:rPr sz="1200" b="0" i="0" u="none">
+              <a:rPr sz="1200" b="0" i="0" u="none" dirty="0">
                 <a:solidFill>
                   <a:srgbClr val="64748B"/>
                 </a:solidFill>
@@ -6224,7 +6606,7 @@
               <a:t>💡 </a:t>
             </a:r>
             <a:r>
-              <a:rPr sz="1200" b="1" i="0" u="none">
+              <a:rPr sz="1200" b="1" i="0" u="none" dirty="0" err="1">
                 <a:solidFill>
                   <a:srgbClr val="64748B"/>
                 </a:solidFill>
@@ -6233,13 +6615,58 @@
               <a:t>原因解析：</a:t>
             </a:r>
             <a:r>
-              <a:rPr sz="1200" b="0" i="0" u="none">
+              <a:rPr sz="1200" b="0" i="0" u="none" dirty="0" err="1">
                 <a:solidFill>
                   <a:srgbClr val="64748B"/>
                 </a:solidFill>
                 <a:latin typeface="Noto Sans TC"/>
               </a:rPr>
-              <a:t>AI 大腦裡存有很多「發明家模板」，只要遇到缺乏資料的題目，就會自動填入高機率的隨機名字！</a:t>
+              <a:t>AI</a:t>
+            </a:r>
+            <a:r>
+              <a:rPr sz="1200" b="0" i="0" u="none" dirty="0">
+                <a:solidFill>
+                  <a:srgbClr val="64748B"/>
+                </a:solidFill>
+                <a:latin typeface="Noto Sans TC"/>
+              </a:rPr>
+              <a:t> </a:t>
+            </a:r>
+            <a:r>
+              <a:rPr sz="1200" b="0" i="0" u="none" dirty="0" err="1">
+                <a:solidFill>
+                  <a:srgbClr val="64748B"/>
+                </a:solidFill>
+                <a:latin typeface="Noto Sans TC"/>
+              </a:rPr>
+              <a:t>大腦裡存有很多「發明家模板</a:t>
+            </a:r>
+            <a:r>
+              <a:rPr sz="1200" b="0" i="0" u="none" dirty="0">
+                <a:solidFill>
+                  <a:srgbClr val="64748B"/>
+                </a:solidFill>
+                <a:latin typeface="Noto Sans TC"/>
+              </a:rPr>
+              <a:t>」，</a:t>
+            </a:r>
+            <a:r>
+              <a:rPr sz="1200" b="0" i="0" u="none" dirty="0" err="1">
+                <a:solidFill>
+                  <a:srgbClr val="64748B"/>
+                </a:solidFill>
+                <a:latin typeface="Noto Sans TC"/>
+              </a:rPr>
+              <a:t>只要遇到缺乏資料的題目，就會自動填入高機率的隨機名字</a:t>
+            </a:r>
+            <a:r>
+              <a:rPr sz="1200" b="0" i="0" u="none" dirty="0">
+                <a:solidFill>
+                  <a:srgbClr val="64748B"/>
+                </a:solidFill>
+                <a:latin typeface="Noto Sans TC"/>
+              </a:rPr>
+              <a:t>！</a:t>
             </a:r>
           </a:p>
         </p:txBody>
@@ -7342,6 +7769,18 @@
   <p:clrMapOvr>
     <a:masterClrMapping/>
   </p:clrMapOvr>
+  <mc:AlternateContent xmlns:mc="http://schemas.openxmlformats.org/markup-compatibility/2006">
+    <mc:Choice xmlns:p14="http://schemas.microsoft.com/office/powerpoint/2010/main" Requires="p14">
+      <p:transition spd="slow" p14:dur="2000">
+        <p:cut/>
+      </p:transition>
+    </mc:Choice>
+    <mc:Fallback>
+      <p:transition spd="slow">
+        <p:cut/>
+      </p:transition>
+    </mc:Fallback>
+  </mc:AlternateContent>
 </p:sld>
 </file>
 
@@ -7470,7 +7909,7 @@
               </a:lnSpc>
             </a:pPr>
             <a:r>
-              <a:rPr sz="1425" b="1" i="0" u="none">
+              <a:rPr sz="1425" b="1" i="0" u="none" dirty="0" err="1">
                 <a:solidFill>
                   <a:srgbClr val="334155"/>
                 </a:solidFill>
@@ -7479,17 +7918,36 @@
               <a:t>推理性結構的幻覺</a:t>
             </a:r>
             <a:r>
+              <a:rPr dirty="0"/>
               <a:t>
 </a:t>
             </a:r>
             <a:r>
-              <a:rPr sz="1425" b="0" i="0" u="none">
+              <a:rPr sz="1425" b="0" i="0" u="none" dirty="0">
                 <a:solidFill>
                   <a:srgbClr val="334155"/>
                 </a:solidFill>
                 <a:latin typeface="Noto Sans TC"/>
               </a:rPr>
-              <a:t> 思考步驟看似非常嚴謹專業，卻在最關鍵的一步直接滑鐵盧！</a:t>
+              <a:t> </a:t>
+            </a:r>
+            <a:r>
+              <a:rPr sz="1425" b="0" i="0" u="none" dirty="0" err="1">
+                <a:solidFill>
+                  <a:srgbClr val="334155"/>
+                </a:solidFill>
+                <a:latin typeface="Noto Sans TC"/>
+              </a:rPr>
+              <a:t>思考步驟看似非常嚴謹專業，卻在最關鍵的一步直接滑鐵盧</a:t>
+            </a:r>
+            <a:r>
+              <a:rPr sz="1425" b="0" i="0" u="none" dirty="0">
+                <a:solidFill>
+                  <a:srgbClr val="334155"/>
+                </a:solidFill>
+                <a:latin typeface="Noto Sans TC"/>
+              </a:rPr>
+              <a:t>！</a:t>
             </a:r>
           </a:p>
         </p:txBody>
@@ -7522,7 +7980,7 @@
               </a:lnSpc>
             </a:pPr>
             <a:r>
-              <a:rPr sz="1425" b="1" i="0" u="none">
+              <a:rPr sz="1425" b="1" i="0" u="none" dirty="0" err="1">
                 <a:solidFill>
                   <a:srgbClr val="334155"/>
                 </a:solidFill>
@@ -7531,17 +7989,54 @@
               <a:t>高發災情區域</a:t>
             </a:r>
             <a:r>
+              <a:rPr dirty="0"/>
               <a:t>
 </a:t>
             </a:r>
             <a:r>
-              <a:rPr sz="1425" b="0" i="0" u="none">
+              <a:rPr sz="1425" b="0" i="0" u="none" dirty="0">
                 <a:solidFill>
                   <a:srgbClr val="334155"/>
                 </a:solidFill>
                 <a:latin typeface="Noto Sans TC"/>
               </a:rPr>
-              <a:t> 多步驟數學計算、邏輯推理難題、程式碼 Debug 分析。</a:t>
+              <a:t> </a:t>
+            </a:r>
+            <a:r>
+              <a:rPr sz="1425" b="0" i="0" u="none" dirty="0" err="1">
+                <a:solidFill>
+                  <a:srgbClr val="334155"/>
+                </a:solidFill>
+                <a:latin typeface="Noto Sans TC"/>
+              </a:rPr>
+              <a:t>多步驟數學計算、邏輯推理難題、程式碼</a:t>
+            </a:r>
+            <a:r>
+              <a:rPr sz="1425" b="0" i="0" u="none" dirty="0">
+                <a:solidFill>
+                  <a:srgbClr val="334155"/>
+                </a:solidFill>
+                <a:latin typeface="Noto Sans TC"/>
+              </a:rPr>
+              <a:t> Debug </a:t>
+            </a:r>
+            <a:r>
+              <a:rPr sz="1425" b="0" i="0" u="none" dirty="0" err="1">
+                <a:solidFill>
+                  <a:srgbClr val="334155"/>
+                </a:solidFill>
+                <a:latin typeface="Noto Sans TC"/>
+              </a:rPr>
+              <a:t>分析</a:t>
+            </a:r>
+            <a:r>
+              <a:rPr sz="1425" b="0" i="0" u="none" dirty="0">
+                <a:solidFill>
+                  <a:srgbClr val="334155"/>
+                </a:solidFill>
+                <a:latin typeface="Noto Sans TC"/>
+              </a:rPr>
+              <a:t>。</a:t>
             </a:r>
           </a:p>
         </p:txBody>
@@ -7574,26 +8069,72 @@
               </a:lnSpc>
             </a:pPr>
             <a:r>
-              <a:rPr sz="1425" b="1" i="0" u="none">
+              <a:rPr sz="1425" b="1" i="0" u="none" dirty="0" err="1">
                 <a:solidFill>
                   <a:srgbClr val="334155"/>
                 </a:solidFill>
                 <a:latin typeface="Noto Sans TC"/>
               </a:rPr>
-              <a:t>畫出推理的「形狀」</a:t>
-            </a:r>
-            <a:r>
+              <a:t>畫出推理的「形狀</a:t>
+            </a:r>
+            <a:r>
+              <a:rPr sz="1425" b="1" i="0" u="none" dirty="0">
+                <a:solidFill>
+                  <a:srgbClr val="334155"/>
+                </a:solidFill>
+                <a:latin typeface="Noto Sans TC"/>
+              </a:rPr>
+              <a:t>」</a:t>
+            </a:r>
+            <a:r>
+              <a:rPr dirty="0"/>
               <a:t>
 </a:t>
             </a:r>
             <a:r>
-              <a:rPr sz="1425" b="0" i="0" u="none">
+              <a:rPr sz="1425" b="0" i="0" u="none" dirty="0">
                 <a:solidFill>
                   <a:srgbClr val="334155"/>
                 </a:solidFill>
                 <a:latin typeface="Noto Sans TC"/>
               </a:rPr>
-              <a:t> AI 並未真正理解數學與程式 logic，只是照著格式模仿排版。</a:t>
+              <a:t> AI </a:t>
+            </a:r>
+            <a:r>
+              <a:rPr sz="1425" b="0" i="0" u="none" dirty="0" err="1">
+                <a:solidFill>
+                  <a:srgbClr val="334155"/>
+                </a:solidFill>
+                <a:latin typeface="Noto Sans TC"/>
+              </a:rPr>
+              <a:t>並未真正理解數學與程式</a:t>
+            </a:r>
+            <a:r>
+              <a:rPr sz="1425" b="0" i="0" u="none" dirty="0">
+                <a:solidFill>
+                  <a:srgbClr val="334155"/>
+                </a:solidFill>
+                <a:latin typeface="Noto Sans TC"/>
+              </a:rPr>
+              <a:t> </a:t>
+            </a:r>
+            <a:r>
+              <a:rPr sz="1425" b="0" i="0" u="none" dirty="0" err="1">
+                <a:solidFill>
+                  <a:srgbClr val="334155"/>
+                </a:solidFill>
+                <a:latin typeface="Noto Sans TC"/>
+              </a:rPr>
+              <a:t>logic，只是照著格式模仿排版</a:t>
+            </a:r>
+            <a:r>
+              <a:rPr sz="1425" b="0" i="0" u="none" dirty="0">
+                <a:solidFill>
+                  <a:srgbClr val="334155"/>
+                </a:solidFill>
+                <a:latin typeface="Noto Sans TC"/>
+              </a:rPr>
+              <a:t>。</a:t>
             </a:r>
           </a:p>
         </p:txBody>
@@ -7718,13 +8259,22 @@
           <a:p>
             <a:pPr algn="l"/>
             <a:r>
-              <a:rPr sz="2850" b="1" i="0" u="none">
+              <a:rPr sz="2850" b="1" i="0" u="none" dirty="0" err="1">
                 <a:solidFill>
                   <a:srgbClr val="0F172A"/>
                 </a:solidFill>
                 <a:latin typeface="Noto Sans TC"/>
               </a:rPr>
-              <a:t>角色三：邏輯大車禍 (Reasoning)</a:t>
+              <a:t>角色三：邏輯大車禍</a:t>
+            </a:r>
+            <a:r>
+              <a:rPr sz="2850" b="1" i="0" u="none" dirty="0">
+                <a:solidFill>
+                  <a:srgbClr val="0F172A"/>
+                </a:solidFill>
+                <a:latin typeface="Noto Sans TC"/>
+              </a:rPr>
+              <a:t> (Reasoning)</a:t>
             </a:r>
           </a:p>
         </p:txBody>
@@ -7734,6 +8284,18 @@
   <p:clrMapOvr>
     <a:masterClrMapping/>
   </p:clrMapOvr>
+  <mc:AlternateContent xmlns:mc="http://schemas.openxmlformats.org/markup-compatibility/2006">
+    <mc:Choice xmlns:p14="http://schemas.microsoft.com/office/powerpoint/2010/main" Requires="p14">
+      <p:transition spd="slow" p14:dur="2000">
+        <p:cut/>
+      </p:transition>
+    </mc:Choice>
+    <mc:Fallback>
+      <p:transition spd="slow">
+        <p:cut/>
+      </p:transition>
+    </mc:Fallback>
+  </mc:AlternateContent>
 </p:sld>
 </file>
 
@@ -7969,16 +8531,52 @@
               </a:lnSpc>
             </a:pPr>
             <a:r>
-              <a:rPr sz="1350" b="0" i="0" u="none">
+              <a:rPr sz="1350" b="0" i="0" u="none" dirty="0">
                 <a:solidFill>
                   <a:srgbClr val="334155"/>
                 </a:solidFill>
                 <a:latin typeface="Noto Sans TC"/>
               </a:rPr>
-              <a:t>1. 原有 5 個蘋果，吃掉 2 個：</a:t>
-            </a:r>
-            <a:r>
-              <a:rPr sz="1350" b="1" i="0" u="none">
+              <a:t>1. </a:t>
+            </a:r>
+            <a:r>
+              <a:rPr sz="1350" b="0" i="0" u="none" dirty="0" err="1">
+                <a:solidFill>
+                  <a:srgbClr val="334155"/>
+                </a:solidFill>
+                <a:latin typeface="Noto Sans TC"/>
+              </a:rPr>
+              <a:t>原有</a:t>
+            </a:r>
+            <a:r>
+              <a:rPr sz="1350" b="0" i="0" u="none" dirty="0">
+                <a:solidFill>
+                  <a:srgbClr val="334155"/>
+                </a:solidFill>
+                <a:latin typeface="Noto Sans TC"/>
+              </a:rPr>
+              <a:t> 5 </a:t>
+            </a:r>
+            <a:r>
+              <a:rPr sz="1350" b="0" i="0" u="none" dirty="0" err="1">
+                <a:solidFill>
+                  <a:srgbClr val="334155"/>
+                </a:solidFill>
+                <a:latin typeface="Noto Sans TC"/>
+              </a:rPr>
+              <a:t>個蘋果，吃掉</a:t>
+            </a:r>
+            <a:r>
+              <a:rPr sz="1350" b="0" i="0" u="none" dirty="0">
+                <a:solidFill>
+                  <a:srgbClr val="334155"/>
+                </a:solidFill>
+                <a:latin typeface="Noto Sans TC"/>
+              </a:rPr>
+              <a:t> 2 個：</a:t>
+            </a:r>
+            <a:r>
+              <a:rPr sz="1350" b="1" i="0" u="none" dirty="0">
                 <a:solidFill>
                   <a:srgbClr val="16A34A"/>
                 </a:solidFill>
@@ -8277,6 +8875,18 @@
   <p:clrMapOvr>
     <a:masterClrMapping/>
   </p:clrMapOvr>
+  <mc:AlternateContent xmlns:mc="http://schemas.openxmlformats.org/markup-compatibility/2006">
+    <mc:Choice xmlns:p14="http://schemas.microsoft.com/office/powerpoint/2010/main" Requires="p14">
+      <p:transition spd="slow" p14:dur="2000">
+        <p:cut/>
+      </p:transition>
+    </mc:Choice>
+    <mc:Fallback>
+      <p:transition spd="slow">
+        <p:cut/>
+      </p:transition>
+    </mc:Fallback>
+  </mc:AlternateContent>
 </p:sld>
 </file>
 
